--- a/Day26-LLM-Orchestration-Tools-and-LangGraph/Day26_Deck_LLM_Orchestration_Tools_and_LangGraph.pptx
+++ b/Day26-LLM-Orchestration-Tools-and-LangGraph/Day26_Deck_LLM_Orchestration_Tools_and_LangGraph.pptx
@@ -5385,13 +5385,13 @@
           <a:noFill/>
         </p:spPr>
         <p:txBody>
-          <a:bodyPr wrap="square" lIns="0" rIns="0" tIns="0" bIns="0" anchor="t">
-            <a:spAutoFit/>
-          </a:bodyPr>
-          <a:lstStyle/>
-          <a:p>
-            <a:r>
-              <a:rPr sz="1085" b="0" i="0">
+          <a:bodyPr wrap="none" lIns="0" rIns="0" tIns="0" bIns="0" anchor="t">
+            <a:spAutoFit/>
+          </a:bodyPr>
+          <a:lstStyle/>
+          <a:p>
+            <a:r>
+              <a:rPr sz="954" b="0" i="0">
                 <a:solidFill>
                   <a:srgbClr val="EAF7F5"/>
                 </a:solidFill>
@@ -5402,7 +5402,7 @@
           </a:p>
           <a:p>
             <a:r>
-              <a:rPr sz="1085" b="0" i="0">
+              <a:rPr sz="954" b="0" i="0">
                 <a:solidFill>
                   <a:srgbClr val="EAF7F5"/>
                 </a:solidFill>
@@ -5413,7 +5413,7 @@
           </a:p>
           <a:p>
             <a:r>
-              <a:rPr sz="1085" b="0" i="0">
+              <a:rPr sz="954" b="0" i="0">
                 <a:solidFill>
                   <a:srgbClr val="EAF7F5"/>
                 </a:solidFill>
@@ -5424,7 +5424,7 @@
           </a:p>
           <a:p>
             <a:r>
-              <a:rPr sz="1085" b="0" i="0">
+              <a:rPr sz="954" b="0" i="0">
                 <a:solidFill>
                   <a:srgbClr val="EAF7F5"/>
                 </a:solidFill>
@@ -5435,7 +5435,7 @@
           </a:p>
           <a:p>
             <a:r>
-              <a:rPr sz="1085" b="0" i="0">
+              <a:rPr sz="954" b="0" i="0">
                 <a:solidFill>
                   <a:srgbClr val="EAF7F5"/>
                 </a:solidFill>
@@ -5446,7 +5446,7 @@
           </a:p>
           <a:p>
             <a:r>
-              <a:rPr sz="1085" b="0" i="0">
+              <a:rPr sz="954" b="0" i="0">
                 <a:solidFill>
                   <a:srgbClr val="EAF7F5"/>
                 </a:solidFill>
@@ -5457,7 +5457,7 @@
           </a:p>
           <a:p>
             <a:r>
-              <a:rPr sz="1085" b="0" i="0">
+              <a:rPr sz="954" b="0" i="0">
                 <a:solidFill>
                   <a:srgbClr val="EAF7F5"/>
                 </a:solidFill>
@@ -5468,7 +5468,7 @@
           </a:p>
           <a:p>
             <a:r>
-              <a:rPr sz="1085" b="0" i="0">
+              <a:rPr sz="954" b="0" i="0">
                 <a:solidFill>
                   <a:srgbClr val="EAF7F5"/>
                 </a:solidFill>
@@ -5479,7 +5479,7 @@
           </a:p>
           <a:p>
             <a:r>
-              <a:rPr sz="1085" b="0" i="0">
+              <a:rPr sz="954" b="0" i="0">
                 <a:solidFill>
                   <a:srgbClr val="EAF7F5"/>
                 </a:solidFill>
@@ -5490,7 +5490,7 @@
           </a:p>
           <a:p>
             <a:r>
-              <a:rPr sz="1085" b="0" i="0">
+              <a:rPr sz="954" b="0" i="0">
                 <a:solidFill>
                   <a:srgbClr val="EAF7F5"/>
                 </a:solidFill>
@@ -5501,7 +5501,7 @@
           </a:p>
           <a:p>
             <a:r>
-              <a:rPr sz="1085" b="0" i="0">
+              <a:rPr sz="954" b="0" i="0">
                 <a:solidFill>
                   <a:srgbClr val="EAF7F5"/>
                 </a:solidFill>
@@ -8818,13 +8818,13 @@
           <a:noFill/>
         </p:spPr>
         <p:txBody>
-          <a:bodyPr wrap="square" lIns="0" rIns="0" tIns="0" bIns="0" anchor="t">
-            <a:spAutoFit/>
-          </a:bodyPr>
-          <a:lstStyle/>
-          <a:p>
-            <a:r>
-              <a:rPr sz="879" b="0" i="0">
+          <a:bodyPr wrap="none" lIns="0" rIns="0" tIns="0" bIns="0" anchor="t">
+            <a:spAutoFit/>
+          </a:bodyPr>
+          <a:lstStyle/>
+          <a:p>
+            <a:r>
+              <a:rPr sz="773" b="0" i="0">
                 <a:solidFill>
                   <a:srgbClr val="EAF7F5"/>
                 </a:solidFill>
@@ -8835,7 +8835,7 @@
           </a:p>
           <a:p>
             <a:r>
-              <a:rPr sz="879" b="0" i="0">
+              <a:rPr sz="773" b="0" i="0">
                 <a:solidFill>
                   <a:srgbClr val="EAF7F5"/>
                 </a:solidFill>
@@ -8846,7 +8846,7 @@
           </a:p>
           <a:p>
             <a:r>
-              <a:rPr sz="879" b="0" i="0">
+              <a:rPr sz="773" b="0" i="0">
                 <a:solidFill>
                   <a:srgbClr val="EAF7F5"/>
                 </a:solidFill>
@@ -8857,7 +8857,7 @@
           </a:p>
           <a:p>
             <a:r>
-              <a:rPr sz="879" b="0" i="0">
+              <a:rPr sz="773" b="0" i="0">
                 <a:solidFill>
                   <a:srgbClr val="EAF7F5"/>
                 </a:solidFill>
@@ -8868,7 +8868,7 @@
           </a:p>
           <a:p>
             <a:r>
-              <a:rPr sz="879" b="0" i="0">
+              <a:rPr sz="773" b="0" i="0">
                 <a:solidFill>
                   <a:srgbClr val="EAF7F5"/>
                 </a:solidFill>
@@ -8879,7 +8879,7 @@
           </a:p>
           <a:p>
             <a:r>
-              <a:rPr sz="879" b="0" i="0">
+              <a:rPr sz="773" b="0" i="0">
                 <a:solidFill>
                   <a:srgbClr val="EAF7F5"/>
                 </a:solidFill>
@@ -8890,7 +8890,7 @@
           </a:p>
           <a:p>
             <a:r>
-              <a:rPr sz="879" b="0" i="0">
+              <a:rPr sz="773" b="0" i="0">
                 <a:solidFill>
                   <a:srgbClr val="EAF7F5"/>
                 </a:solidFill>
@@ -8901,7 +8901,7 @@
           </a:p>
           <a:p>
             <a:r>
-              <a:rPr sz="879" b="0" i="0">
+              <a:rPr sz="773" b="0" i="0">
                 <a:solidFill>
                   <a:srgbClr val="EAF7F5"/>
                 </a:solidFill>
@@ -8912,7 +8912,7 @@
           </a:p>
           <a:p>
             <a:r>
-              <a:rPr sz="879" b="0" i="0">
+              <a:rPr sz="773" b="0" i="0">
                 <a:solidFill>
                   <a:srgbClr val="EAF7F5"/>
                 </a:solidFill>
@@ -8923,7 +8923,7 @@
           </a:p>
           <a:p>
             <a:r>
-              <a:rPr sz="879" b="0" i="0">
+              <a:rPr sz="773" b="0" i="0">
                 <a:solidFill>
                   <a:srgbClr val="EAF7F5"/>
                 </a:solidFill>
@@ -8934,7 +8934,7 @@
           </a:p>
           <a:p>
             <a:r>
-              <a:rPr sz="879" b="0" i="0">
+              <a:rPr sz="773" b="0" i="0">
                 <a:solidFill>
                   <a:srgbClr val="EAF7F5"/>
                 </a:solidFill>
@@ -8945,7 +8945,7 @@
           </a:p>
           <a:p>
             <a:r>
-              <a:rPr sz="879" b="0" i="0">
+              <a:rPr sz="773" b="0" i="0">
                 <a:solidFill>
                   <a:srgbClr val="EAF7F5"/>
                 </a:solidFill>
@@ -11981,13 +11981,13 @@
           <a:noFill/>
         </p:spPr>
         <p:txBody>
-          <a:bodyPr wrap="square" lIns="0" rIns="0" tIns="0" bIns="0" anchor="t">
-            <a:spAutoFit/>
-          </a:bodyPr>
-          <a:lstStyle/>
-          <a:p>
-            <a:r>
-              <a:rPr sz="1019" b="0" i="0">
+          <a:bodyPr wrap="none" lIns="0" rIns="0" tIns="0" bIns="0" anchor="t">
+            <a:spAutoFit/>
+          </a:bodyPr>
+          <a:lstStyle/>
+          <a:p>
+            <a:r>
+              <a:rPr sz="897" b="0" i="0">
                 <a:solidFill>
                   <a:srgbClr val="EAF7F5"/>
                 </a:solidFill>
@@ -11998,7 +11998,7 @@
           </a:p>
           <a:p>
             <a:r>
-              <a:rPr sz="1019" b="0" i="0">
+              <a:rPr sz="897" b="0" i="0">
                 <a:solidFill>
                   <a:srgbClr val="EAF7F5"/>
                 </a:solidFill>
@@ -12009,7 +12009,7 @@
           </a:p>
           <a:p>
             <a:r>
-              <a:rPr sz="1019" b="0" i="0">
+              <a:rPr sz="897" b="0" i="0">
                 <a:solidFill>
                   <a:srgbClr val="EAF7F5"/>
                 </a:solidFill>
@@ -12020,7 +12020,7 @@
           </a:p>
           <a:p>
             <a:r>
-              <a:rPr sz="1019" b="0" i="0">
+              <a:rPr sz="897" b="0" i="0">
                 <a:solidFill>
                   <a:srgbClr val="EAF7F5"/>
                 </a:solidFill>
@@ -12031,7 +12031,7 @@
           </a:p>
           <a:p>
             <a:r>
-              <a:rPr sz="1019" b="0" i="0">
+              <a:rPr sz="897" b="0" i="0">
                 <a:solidFill>
                   <a:srgbClr val="EAF7F5"/>
                 </a:solidFill>
@@ -12042,7 +12042,7 @@
           </a:p>
           <a:p>
             <a:r>
-              <a:rPr sz="1019" b="0" i="0">
+              <a:rPr sz="897" b="0" i="0">
                 <a:solidFill>
                   <a:srgbClr val="EAF7F5"/>
                 </a:solidFill>
@@ -12053,7 +12053,7 @@
           </a:p>
           <a:p>
             <a:r>
-              <a:rPr sz="1019" b="0" i="0">
+              <a:rPr sz="897" b="0" i="0">
                 <a:solidFill>
                   <a:srgbClr val="EAF7F5"/>
                 </a:solidFill>
@@ -12064,7 +12064,7 @@
           </a:p>
           <a:p>
             <a:r>
-              <a:rPr sz="1019" b="0" i="0">
+              <a:rPr sz="897" b="0" i="0">
                 <a:solidFill>
                   <a:srgbClr val="EAF7F5"/>
                 </a:solidFill>
@@ -12075,7 +12075,7 @@
           </a:p>
           <a:p>
             <a:r>
-              <a:rPr sz="1019" b="0" i="0">
+              <a:rPr sz="897" b="0" i="0">
                 <a:solidFill>
                   <a:srgbClr val="EAF7F5"/>
                 </a:solidFill>
@@ -12086,7 +12086,7 @@
           </a:p>
           <a:p>
             <a:r>
-              <a:rPr sz="1019" b="0" i="0">
+              <a:rPr sz="897" b="0" i="0">
                 <a:solidFill>
                   <a:srgbClr val="EAF7F5"/>
                 </a:solidFill>
@@ -12097,7 +12097,7 @@
           </a:p>
           <a:p>
             <a:r>
-              <a:rPr sz="1019" b="0" i="0">
+              <a:rPr sz="897" b="0" i="0">
                 <a:solidFill>
                   <a:srgbClr val="EAF7F5"/>
                 </a:solidFill>
@@ -12108,7 +12108,7 @@
           </a:p>
           <a:p>
             <a:r>
-              <a:rPr sz="1019" b="0" i="0">
+              <a:rPr sz="897" b="0" i="0">
                 <a:solidFill>
                   <a:srgbClr val="EAF7F5"/>
                 </a:solidFill>
@@ -13447,13 +13447,13 @@
           <a:noFill/>
         </p:spPr>
         <p:txBody>
-          <a:bodyPr wrap="square" lIns="0" rIns="0" tIns="0" bIns="0" anchor="t">
-            <a:spAutoFit/>
-          </a:bodyPr>
-          <a:lstStyle/>
-          <a:p>
-            <a:r>
-              <a:rPr sz="1085" b="0" i="0">
+          <a:bodyPr wrap="none" lIns="0" rIns="0" tIns="0" bIns="0" anchor="t">
+            <a:spAutoFit/>
+          </a:bodyPr>
+          <a:lstStyle/>
+          <a:p>
+            <a:r>
+              <a:rPr sz="954" b="0" i="0">
                 <a:solidFill>
                   <a:srgbClr val="EAF7F5"/>
                 </a:solidFill>
@@ -13464,7 +13464,7 @@
           </a:p>
           <a:p>
             <a:r>
-              <a:rPr sz="1085" b="0" i="0">
+              <a:rPr sz="954" b="0" i="0">
                 <a:solidFill>
                   <a:srgbClr val="EAF7F5"/>
                 </a:solidFill>
@@ -13475,7 +13475,7 @@
           </a:p>
           <a:p>
             <a:r>
-              <a:rPr sz="1085" b="0" i="0">
+              <a:rPr sz="954" b="0" i="0">
                 <a:solidFill>
                   <a:srgbClr val="EAF7F5"/>
                 </a:solidFill>
@@ -13486,7 +13486,7 @@
           </a:p>
           <a:p>
             <a:r>
-              <a:rPr sz="1085" b="0" i="0">
+              <a:rPr sz="954" b="0" i="0">
                 <a:solidFill>
                   <a:srgbClr val="EAF7F5"/>
                 </a:solidFill>
@@ -13497,7 +13497,7 @@
           </a:p>
           <a:p>
             <a:r>
-              <a:rPr sz="1085" b="0" i="0">
+              <a:rPr sz="954" b="0" i="0">
                 <a:solidFill>
                   <a:srgbClr val="EAF7F5"/>
                 </a:solidFill>
@@ -13508,7 +13508,7 @@
           </a:p>
           <a:p>
             <a:r>
-              <a:rPr sz="1085" b="0" i="0">
+              <a:rPr sz="954" b="0" i="0">
                 <a:solidFill>
                   <a:srgbClr val="EAF7F5"/>
                 </a:solidFill>
@@ -13519,7 +13519,7 @@
           </a:p>
           <a:p>
             <a:r>
-              <a:rPr sz="1085" b="0" i="0">
+              <a:rPr sz="954" b="0" i="0">
                 <a:solidFill>
                   <a:srgbClr val="EAF7F5"/>
                 </a:solidFill>
@@ -13530,7 +13530,7 @@
           </a:p>
           <a:p>
             <a:r>
-              <a:rPr sz="1085" b="0" i="0">
+              <a:rPr sz="954" b="0" i="0">
                 <a:solidFill>
                   <a:srgbClr val="EAF7F5"/>
                 </a:solidFill>
@@ -13541,7 +13541,7 @@
           </a:p>
           <a:p>
             <a:r>
-              <a:rPr sz="1085" b="0" i="0">
+              <a:rPr sz="954" b="0" i="0">
                 <a:solidFill>
                   <a:srgbClr val="EAF7F5"/>
                 </a:solidFill>
@@ -13552,7 +13552,7 @@
           </a:p>
           <a:p>
             <a:r>
-              <a:rPr sz="1085" b="0" i="0">
+              <a:rPr sz="954" b="0" i="0">
                 <a:solidFill>
                   <a:srgbClr val="EAF7F5"/>
                 </a:solidFill>
@@ -13563,7 +13563,7 @@
           </a:p>
           <a:p>
             <a:r>
-              <a:rPr sz="1085" b="0" i="0">
+              <a:rPr sz="954" b="0" i="0">
                 <a:solidFill>
                   <a:srgbClr val="EAF7F5"/>
                 </a:solidFill>
@@ -18941,13 +18941,13 @@
           <a:noFill/>
         </p:spPr>
         <p:txBody>
-          <a:bodyPr wrap="square" lIns="0" rIns="0" tIns="0" bIns="0" anchor="t">
-            <a:spAutoFit/>
-          </a:bodyPr>
-          <a:lstStyle/>
-          <a:p>
-            <a:r>
-              <a:rPr sz="894" b="0" i="0">
+          <a:bodyPr wrap="none" lIns="0" rIns="0" tIns="0" bIns="0" anchor="t">
+            <a:spAutoFit/>
+          </a:bodyPr>
+          <a:lstStyle/>
+          <a:p>
+            <a:r>
+              <a:rPr sz="787" b="0" i="0">
                 <a:solidFill>
                   <a:srgbClr val="EAF7F5"/>
                 </a:solidFill>
@@ -18958,7 +18958,7 @@
           </a:p>
           <a:p>
             <a:r>
-              <a:rPr sz="894" b="0" i="0">
+              <a:rPr sz="787" b="0" i="0">
                 <a:solidFill>
                   <a:srgbClr val="EAF7F5"/>
                 </a:solidFill>
@@ -18969,7 +18969,7 @@
           </a:p>
           <a:p>
             <a:r>
-              <a:rPr sz="894" b="0" i="0">
+              <a:rPr sz="787" b="0" i="0">
                 <a:solidFill>
                   <a:srgbClr val="EAF7F5"/>
                 </a:solidFill>
@@ -18980,7 +18980,7 @@
           </a:p>
           <a:p>
             <a:r>
-              <a:rPr sz="894" b="0" i="0">
+              <a:rPr sz="787" b="0" i="0">
                 <a:solidFill>
                   <a:srgbClr val="EAF7F5"/>
                 </a:solidFill>
@@ -18991,7 +18991,7 @@
           </a:p>
           <a:p>
             <a:r>
-              <a:rPr sz="894" b="0" i="0">
+              <a:rPr sz="787" b="0" i="0">
                 <a:solidFill>
                   <a:srgbClr val="EAF7F5"/>
                 </a:solidFill>
@@ -19002,7 +19002,7 @@
           </a:p>
           <a:p>
             <a:r>
-              <a:rPr sz="894" b="0" i="0">
+              <a:rPr sz="787" b="0" i="0">
                 <a:solidFill>
                   <a:srgbClr val="EAF7F5"/>
                 </a:solidFill>
@@ -19013,7 +19013,7 @@
           </a:p>
           <a:p>
             <a:r>
-              <a:rPr sz="894" b="0" i="0">
+              <a:rPr sz="787" b="0" i="0">
                 <a:solidFill>
                   <a:srgbClr val="EAF7F5"/>
                 </a:solidFill>
@@ -19024,7 +19024,7 @@
           </a:p>
           <a:p>
             <a:r>
-              <a:rPr sz="894" b="0" i="0">
+              <a:rPr sz="787" b="0" i="0">
                 <a:solidFill>
                   <a:srgbClr val="EAF7F5"/>
                 </a:solidFill>
@@ -19035,7 +19035,7 @@
           </a:p>
           <a:p>
             <a:r>
-              <a:rPr sz="894" b="0" i="0">
+              <a:rPr sz="787" b="0" i="0">
                 <a:solidFill>
                   <a:srgbClr val="EAF7F5"/>
                 </a:solidFill>
@@ -19046,7 +19046,7 @@
           </a:p>
           <a:p>
             <a:r>
-              <a:rPr sz="894" b="0" i="0">
+              <a:rPr sz="787" b="0" i="0">
                 <a:solidFill>
                   <a:srgbClr val="EAF7F5"/>
                 </a:solidFill>
@@ -19856,13 +19856,13 @@
           <a:noFill/>
         </p:spPr>
         <p:txBody>
-          <a:bodyPr wrap="square" lIns="0" rIns="0" tIns="0" bIns="0" anchor="t">
-            <a:spAutoFit/>
-          </a:bodyPr>
-          <a:lstStyle/>
-          <a:p>
-            <a:r>
-              <a:rPr sz="910" b="0" i="0">
+          <a:bodyPr wrap="none" lIns="0" rIns="0" tIns="0" bIns="0" anchor="t">
+            <a:spAutoFit/>
+          </a:bodyPr>
+          <a:lstStyle/>
+          <a:p>
+            <a:r>
+              <a:rPr sz="801" b="0" i="0">
                 <a:solidFill>
                   <a:srgbClr val="EAF7F5"/>
                 </a:solidFill>
@@ -19873,7 +19873,7 @@
           </a:p>
           <a:p>
             <a:r>
-              <a:rPr sz="910" b="0" i="0">
+              <a:rPr sz="801" b="0" i="0">
                 <a:solidFill>
                   <a:srgbClr val="EAF7F5"/>
                 </a:solidFill>
@@ -19884,7 +19884,7 @@
           </a:p>
           <a:p>
             <a:r>
-              <a:rPr sz="910" b="0" i="0">
+              <a:rPr sz="801" b="0" i="0">
                 <a:solidFill>
                   <a:srgbClr val="EAF7F5"/>
                 </a:solidFill>
@@ -19895,7 +19895,7 @@
           </a:p>
           <a:p>
             <a:r>
-              <a:rPr sz="910" b="0" i="0">
+              <a:rPr sz="801" b="0" i="0">
                 <a:solidFill>
                   <a:srgbClr val="EAF7F5"/>
                 </a:solidFill>
@@ -19906,7 +19906,7 @@
           </a:p>
           <a:p>
             <a:r>
-              <a:rPr sz="910" b="0" i="0">
+              <a:rPr sz="801" b="0" i="0">
                 <a:solidFill>
                   <a:srgbClr val="EAF7F5"/>
                 </a:solidFill>
@@ -19917,7 +19917,7 @@
           </a:p>
           <a:p>
             <a:r>
-              <a:rPr sz="910" b="0" i="0">
+              <a:rPr sz="801" b="0" i="0">
                 <a:solidFill>
                   <a:srgbClr val="EAF7F5"/>
                 </a:solidFill>
@@ -19928,7 +19928,7 @@
           </a:p>
           <a:p>
             <a:r>
-              <a:rPr sz="910" b="0" i="0">
+              <a:rPr sz="801" b="0" i="0">
                 <a:solidFill>
                   <a:srgbClr val="EAF7F5"/>
                 </a:solidFill>
@@ -19939,7 +19939,7 @@
           </a:p>
           <a:p>
             <a:r>
-              <a:rPr sz="910" b="0" i="0">
+              <a:rPr sz="801" b="0" i="0">
                 <a:solidFill>
                   <a:srgbClr val="EAF7F5"/>
                 </a:solidFill>
@@ -19950,7 +19950,7 @@
           </a:p>
           <a:p>
             <a:r>
-              <a:rPr sz="910" b="0" i="0">
+              <a:rPr sz="801" b="0" i="0">
                 <a:solidFill>
                   <a:srgbClr val="EAF7F5"/>
                 </a:solidFill>
@@ -19961,7 +19961,7 @@
           </a:p>
           <a:p>
             <a:r>
-              <a:rPr sz="910" b="0" i="0">
+              <a:rPr sz="801" b="0" i="0">
                 <a:solidFill>
                   <a:srgbClr val="EAF7F5"/>
                 </a:solidFill>
@@ -19972,7 +19972,7 @@
           </a:p>
           <a:p>
             <a:r>
-              <a:rPr sz="910" b="0" i="0">
+              <a:rPr sz="801" b="0" i="0">
                 <a:solidFill>
                   <a:srgbClr val="EAF7F5"/>
                 </a:solidFill>
